--- a/Aula01 — Introdução ao HTML e Desenvolvimento Web.pptx
+++ b/Aula01 — Introdução ao HTML e Desenvolvimento Web.pptx
@@ -6408,8 +6408,21 @@
             </a:r>
             <a:r>
               <a:rPr lang="pt-BR" sz="2800" dirty="0"/>
-              <a:t> - HTML Preview </a:t>
-            </a:r>
+              <a:t> - HTML </a:t>
+            </a:r>
+            <a:r>
+              <a:rPr lang="pt-BR" sz="2800" dirty="0" err="1"/>
+              <a:t>Preview</a:t>
+            </a:r>
+            <a:r>
+              <a:rPr lang="pt-BR" sz="2800"/>
+              <a:t> </a:t>
+            </a:r>
+            <a:r>
+              <a:rPr lang="pt-BR" sz="2800" smtClean="0"/>
+              <a:t>aa</a:t>
+            </a:r>
+            <a:endParaRPr lang="pt-BR" sz="2800" dirty="0"/>
           </a:p>
         </p:txBody>
       </p:sp>
@@ -6463,7 +6476,7 @@
           <p:nvPr/>
         </p:nvPicPr>
         <p:blipFill>
-          <a:blip r:embed="rId2">
+          <a:blip r:embed="rId2" cstate="hqprint">
             <a:extLst>
               <a:ext uri="{28A0092B-C50C-407E-A947-70E740481C1C}">
                 <a14:useLocalDpi xmlns:a14="http://schemas.microsoft.com/office/drawing/2010/main" val="0"/>
@@ -6734,6 +6747,10 @@
               <a:rPr lang="pt-BR" dirty="0"/>
               <a:t>   &lt;!--Comentários--&gt;</a:t>
             </a:r>
+            <a:r>
+              <a:rPr lang="pt-BR" sz="2400" b="1" dirty="0"/>
+              <a:t/>
+            </a:r>
             <a:br>
               <a:rPr lang="pt-BR" sz="2400" b="1" dirty="0"/>
             </a:br>
@@ -7955,6 +7972,10 @@
               <a:rPr lang="pt-BR" u="sng" dirty="0"/>
               <a:t>;"&gt;</a:t>
             </a:r>
+            <a:r>
+              <a:rPr lang="pt-BR" dirty="0"/>
+              <a:t/>
+            </a:r>
             <a:br>
               <a:rPr lang="pt-BR" dirty="0"/>
             </a:br>
@@ -8691,6 +8712,10 @@
               <a:rPr lang="pt-BR" sz="2400" dirty="0" err="1"/>
               <a:t>back-end</a:t>
             </a:r>
+            <a:r>
+              <a:rPr lang="pt-BR" sz="2400" dirty="0"/>
+              <a:t/>
+            </a:r>
             <a:br>
               <a:rPr lang="pt-BR" sz="2400" dirty="0"/>
             </a:br>
@@ -9216,6 +9241,10 @@
             </a:r>
           </a:p>
           <a:p>
+            <a:r>
+              <a:rPr lang="pt-BR" sz="2000" dirty="0"/>
+              <a:t/>
+            </a:r>
             <a:br>
               <a:rPr lang="pt-BR" sz="2000" dirty="0"/>
             </a:br>
